--- a/public/fun/pack/pptx/familypro/가족소개프리미엄_28_3대가족_올리브브론즈.pptx
+++ b/public/fun/pack/pptx/familypro/가족소개프리미엄_28_3대가족_올리브브론즈.pptx
@@ -113,12 +113,12 @@
   <p:extLst>
     <p:ext uri="{521415D9-36F7-43E2-AB2F-B90AF26B5E84}">
       <p14:sectionLst xmlns:p14="http://schemas.microsoft.com/office/powerpoint/2010/main">
-        <p14:section name="시작" id="{E1D03929-AC73-4BD2-86A1-7169CB0081AF}">
+        <p14:section name="시작" id="{E34C5180-3F00-4AC9-B0C8-325EE4A9867F}">
           <p14:sldIdLst>
             <p14:sldId id="256"/>
           </p14:sldIdLst>
         </p14:section>
-        <p14:section name="본문" id="{07ADFF93-91CA-42AF-9EE5-C07EB1328EF6}">
+        <p14:section name="본문" id="{1FBC6981-4B4F-4960-A9C2-382B8BEDA807}">
           <p14:sldIdLst>
             <p14:sldId id="257"/>
             <p14:sldId id="258"/>
@@ -127,7 +127,7 @@
             <p14:sldId id="261"/>
           </p14:sldIdLst>
         </p14:section>
-        <p14:section name="마무리" id="{84B361C1-5090-4D81-96E3-8878059C4E42}">
+        <p14:section name="마무리" id="{C0C825F2-BCCA-48DF-82F8-1E5F4577B3C6}">
           <p14:sldIdLst>
             <p14:sldId id="262"/>
           </p14:sldIdLst>
@@ -1516,7 +1516,7 @@
             </a:lvl1pPr>
           </a:lstStyle>
           <a:p>
-            <a:fld id="{BDC87457-90A2-4239-A91E-777480C17F2F}" type="slidenum">
+            <a:fld id="{0B1602D6-3B3E-4585-AC7E-A7DEEE119007}" type="slidenum">
               <a:rPr lang="en-US"/>
               <a:t>‹#›</a:t>
             </a:fld>
@@ -2113,7 +2113,7 @@
             </a:lvl1pPr>
           </a:lstStyle>
           <a:p>
-            <a:fld id="{C3504322-0E6F-44EC-85AA-7DBB48BAA06E}" type="slidenum">
+            <a:fld id="{C426754C-7A43-45CE-B4D8-3A07FED3E883}" type="slidenum">
               <a:rPr lang="en-US"/>
               <a:t>‹#›</a:t>
             </a:fld>
@@ -2750,7 +2750,7 @@
             </a:lvl1pPr>
           </a:lstStyle>
           <a:p>
-            <a:fld id="{84386042-B44D-40A0-A427-0480297DFE58}" type="slidenum">
+            <a:fld id="{471230AC-0E8C-4A15-ABAF-2A0F6E91F477}" type="slidenum">
               <a:rPr lang="en-US"/>
               <a:t>‹#›</a:t>
             </a:fld>
@@ -3611,7 +3611,7 @@
           <a:p>
             <a:r>
               <a:rPr lang="ko-KR"/>
-              <a:t>3대 가족 · 0000. 00. 00</a:t>
+              <a:t>3대 가족 · 날짜 입력</a:t>
             </a:r>
           </a:p>
         </p:txBody>
@@ -4110,7 +4110,7 @@
           <a:bodyPr/>
           <a:lstStyle/>
           <a:p>
-            <a:fld id="{82B7A2A3-3DCE-4D5F-ACAD-FEE712FC3BE0}" type="slidenum">
+            <a:fld id="{1824D57A-7AF0-4D0D-8CFE-A0F783CCB9BD}" type="slidenum">
               <a:rPr lang="en-US"/>
               <a:t>‹#›</a:t>
             </a:fld>
@@ -5290,7 +5290,7 @@
           <a:bodyPr/>
           <a:lstStyle/>
           <a:p>
-            <a:fld id="{85835143-249B-4A90-94B1-D1CFB33B040B}" type="slidenum">
+            <a:fld id="{66C1532D-2F5B-41D1-A246-711379B9AEBE}" type="slidenum">
               <a:rPr lang="en-US"/>
               <a:t>‹#›</a:t>
             </a:fld>
@@ -6265,7 +6265,7 @@
           <a:bodyPr/>
           <a:lstStyle/>
           <a:p>
-            <a:fld id="{0625C396-A0E4-42A3-BD23-F2480364A477}" type="slidenum">
+            <a:fld id="{9541262C-0F97-4154-BA79-B72530BB3C4E}" type="slidenum">
               <a:rPr lang="en-US"/>
               <a:t>‹#›</a:t>
             </a:fld>
@@ -7613,7 +7613,7 @@
           <a:bodyPr/>
           <a:lstStyle/>
           <a:p>
-            <a:fld id="{F44698B2-E334-4C42-8F9A-0A5008825D6A}" type="slidenum">
+            <a:fld id="{B73A67EB-3EBF-4241-AEE0-8A79D4213E64}" type="slidenum">
               <a:rPr lang="en-US"/>
               <a:t>‹#›</a:t>
             </a:fld>
@@ -7701,7 +7701,7 @@
           <a:bodyPr/>
           <a:lstStyle/>
           <a:p>
-            <a:fld id="{A28175E2-F171-4BB1-BCDD-234BE37AD423}" type="slidenum">
+            <a:fld id="{82303290-03B4-4237-919A-B0CCDBD81C9D}" type="slidenum">
               <a:rPr lang="en-US"/>
               <a:t>‹#›</a:t>
             </a:fld>
